--- a/assets/files/4_Slide_Transisi.pptx
+++ b/assets/files/4_Slide_Transisi.pptx
@@ -264,7 +264,7 @@
           <a:p>
             <a:fld id="{AB6FC267-2E41-4708-BFF3-2E183C4279E0}" type="datetimeFigureOut">
               <a:rPr lang="id-ID" smtClean="0"/>
-              <a:t>11/07/2026</a:t>
+              <a:t>15/07/2026</a:t>
             </a:fld>
             <a:endParaRPr lang="id-ID"/>
           </a:p>
@@ -464,7 +464,7 @@
           <a:p>
             <a:fld id="{AB6FC267-2E41-4708-BFF3-2E183C4279E0}" type="datetimeFigureOut">
               <a:rPr lang="id-ID" smtClean="0"/>
-              <a:t>11/07/2026</a:t>
+              <a:t>15/07/2026</a:t>
             </a:fld>
             <a:endParaRPr lang="id-ID"/>
           </a:p>
@@ -674,7 +674,7 @@
           <a:p>
             <a:fld id="{AB6FC267-2E41-4708-BFF3-2E183C4279E0}" type="datetimeFigureOut">
               <a:rPr lang="id-ID" smtClean="0"/>
-              <a:t>11/07/2026</a:t>
+              <a:t>15/07/2026</a:t>
             </a:fld>
             <a:endParaRPr lang="id-ID"/>
           </a:p>
@@ -874,7 +874,7 @@
           <a:p>
             <a:fld id="{AB6FC267-2E41-4708-BFF3-2E183C4279E0}" type="datetimeFigureOut">
               <a:rPr lang="id-ID" smtClean="0"/>
-              <a:t>11/07/2026</a:t>
+              <a:t>15/07/2026</a:t>
             </a:fld>
             <a:endParaRPr lang="id-ID"/>
           </a:p>
@@ -1150,7 +1150,7 @@
           <a:p>
             <a:fld id="{AB6FC267-2E41-4708-BFF3-2E183C4279E0}" type="datetimeFigureOut">
               <a:rPr lang="id-ID" smtClean="0"/>
-              <a:t>11/07/2026</a:t>
+              <a:t>15/07/2026</a:t>
             </a:fld>
             <a:endParaRPr lang="id-ID"/>
           </a:p>
@@ -1418,7 +1418,7 @@
           <a:p>
             <a:fld id="{AB6FC267-2E41-4708-BFF3-2E183C4279E0}" type="datetimeFigureOut">
               <a:rPr lang="id-ID" smtClean="0"/>
-              <a:t>11/07/2026</a:t>
+              <a:t>15/07/2026</a:t>
             </a:fld>
             <a:endParaRPr lang="id-ID"/>
           </a:p>
@@ -1833,7 +1833,7 @@
           <a:p>
             <a:fld id="{AB6FC267-2E41-4708-BFF3-2E183C4279E0}" type="datetimeFigureOut">
               <a:rPr lang="id-ID" smtClean="0"/>
-              <a:t>11/07/2026</a:t>
+              <a:t>15/07/2026</a:t>
             </a:fld>
             <a:endParaRPr lang="id-ID"/>
           </a:p>
@@ -1975,7 +1975,7 @@
           <a:p>
             <a:fld id="{AB6FC267-2E41-4708-BFF3-2E183C4279E0}" type="datetimeFigureOut">
               <a:rPr lang="id-ID" smtClean="0"/>
-              <a:t>11/07/2026</a:t>
+              <a:t>15/07/2026</a:t>
             </a:fld>
             <a:endParaRPr lang="id-ID"/>
           </a:p>
@@ -2088,7 +2088,7 @@
           <a:p>
             <a:fld id="{AB6FC267-2E41-4708-BFF3-2E183C4279E0}" type="datetimeFigureOut">
               <a:rPr lang="id-ID" smtClean="0"/>
-              <a:t>11/07/2026</a:t>
+              <a:t>15/07/2026</a:t>
             </a:fld>
             <a:endParaRPr lang="id-ID"/>
           </a:p>
@@ -2401,7 +2401,7 @@
           <a:p>
             <a:fld id="{AB6FC267-2E41-4708-BFF3-2E183C4279E0}" type="datetimeFigureOut">
               <a:rPr lang="id-ID" smtClean="0"/>
-              <a:t>11/07/2026</a:t>
+              <a:t>15/07/2026</a:t>
             </a:fld>
             <a:endParaRPr lang="id-ID"/>
           </a:p>
@@ -2690,7 +2690,7 @@
           <a:p>
             <a:fld id="{AB6FC267-2E41-4708-BFF3-2E183C4279E0}" type="datetimeFigureOut">
               <a:rPr lang="id-ID" smtClean="0"/>
-              <a:t>11/07/2026</a:t>
+              <a:t>15/07/2026</a:t>
             </a:fld>
             <a:endParaRPr lang="id-ID"/>
           </a:p>
@@ -2933,7 +2933,7 @@
           <a:p>
             <a:fld id="{AB6FC267-2E41-4708-BFF3-2E183C4279E0}" type="datetimeFigureOut">
               <a:rPr lang="id-ID" smtClean="0"/>
-              <a:t>11/07/2026</a:t>
+              <a:t>15/07/2026</a:t>
             </a:fld>
             <a:endParaRPr lang="id-ID"/>
           </a:p>
@@ -3403,7 +3403,7 @@
                   </a:outerShdw>
                 </a:effectLst>
               </a:rPr>
-              <a:t>→ </a:t>
+              <a:t>: “</a:t>
             </a:r>
             <a:r>
               <a:rPr lang="id-ID" sz="4000" dirty="0">
@@ -3421,6 +3421,35 @@
               </a:rPr>
               <a:t>Fade</a:t>
             </a:r>
+            <a:r>
+              <a:rPr lang="en-US" sz="4000" dirty="0">
+                <a:ln w="0"/>
+                <a:solidFill>
+                  <a:schemeClr val="accent1"/>
+                </a:solidFill>
+                <a:effectLst>
+                  <a:outerShdw blurRad="38100" dist="25400" dir="5400000" algn="ctr" rotWithShape="0">
+                    <a:srgbClr val="6E747A">
+                      <a:alpha val="43000"/>
+                    </a:srgbClr>
+                  </a:outerShdw>
+                </a:effectLst>
+              </a:rPr>
+              <a:t>”</a:t>
+            </a:r>
+            <a:endParaRPr lang="id-ID" sz="4000" dirty="0">
+              <a:ln w="0"/>
+              <a:solidFill>
+                <a:schemeClr val="accent1"/>
+              </a:solidFill>
+              <a:effectLst>
+                <a:outerShdw blurRad="38100" dist="25400" dir="5400000" algn="ctr" rotWithShape="0">
+                  <a:srgbClr val="6E747A">
+                    <a:alpha val="43000"/>
+                  </a:srgbClr>
+                </a:outerShdw>
+              </a:effectLst>
+            </a:endParaRPr>
           </a:p>
         </p:txBody>
       </p:sp>
@@ -3519,7 +3548,7 @@
                   </a:outerShdw>
                 </a:effectLst>
               </a:rPr>
-              <a:t>→ </a:t>
+              <a:t>: “</a:t>
             </a:r>
             <a:r>
               <a:rPr lang="id-ID" sz="4000" dirty="0">
@@ -3537,6 +3566,35 @@
               </a:rPr>
               <a:t>Push</a:t>
             </a:r>
+            <a:r>
+              <a:rPr lang="en-US" sz="4000" dirty="0">
+                <a:ln w="0"/>
+                <a:solidFill>
+                  <a:schemeClr val="accent1"/>
+                </a:solidFill>
+                <a:effectLst>
+                  <a:outerShdw blurRad="38100" dist="25400" dir="5400000" algn="ctr" rotWithShape="0">
+                    <a:srgbClr val="6E747A">
+                      <a:alpha val="43000"/>
+                    </a:srgbClr>
+                  </a:outerShdw>
+                </a:effectLst>
+              </a:rPr>
+              <a:t>”</a:t>
+            </a:r>
+            <a:endParaRPr lang="id-ID" sz="4000" dirty="0">
+              <a:ln w="0"/>
+              <a:solidFill>
+                <a:schemeClr val="accent1"/>
+              </a:solidFill>
+              <a:effectLst>
+                <a:outerShdw blurRad="38100" dist="25400" dir="5400000" algn="ctr" rotWithShape="0">
+                  <a:srgbClr val="6E747A">
+                    <a:alpha val="43000"/>
+                  </a:srgbClr>
+                </a:outerShdw>
+              </a:effectLst>
+            </a:endParaRPr>
           </a:p>
         </p:txBody>
       </p:sp>
@@ -3635,7 +3693,7 @@
                   </a:outerShdw>
                 </a:effectLst>
               </a:rPr>
-              <a:t>→ </a:t>
+              <a:t>: “</a:t>
             </a:r>
             <a:r>
               <a:rPr lang="id-ID" sz="4000" dirty="0">
@@ -3653,6 +3711,35 @@
               </a:rPr>
               <a:t>Wipe</a:t>
             </a:r>
+            <a:r>
+              <a:rPr lang="en-US" sz="4000" dirty="0">
+                <a:ln w="0"/>
+                <a:solidFill>
+                  <a:schemeClr val="accent1"/>
+                </a:solidFill>
+                <a:effectLst>
+                  <a:outerShdw blurRad="38100" dist="25400" dir="5400000" algn="ctr" rotWithShape="0">
+                    <a:srgbClr val="6E747A">
+                      <a:alpha val="43000"/>
+                    </a:srgbClr>
+                  </a:outerShdw>
+                </a:effectLst>
+              </a:rPr>
+              <a:t>”</a:t>
+            </a:r>
+            <a:endParaRPr lang="id-ID" sz="4000" dirty="0">
+              <a:ln w="0"/>
+              <a:solidFill>
+                <a:schemeClr val="accent1"/>
+              </a:solidFill>
+              <a:effectLst>
+                <a:outerShdw blurRad="38100" dist="25400" dir="5400000" algn="ctr" rotWithShape="0">
+                  <a:srgbClr val="6E747A">
+                    <a:alpha val="43000"/>
+                  </a:srgbClr>
+                </a:outerShdw>
+              </a:effectLst>
+            </a:endParaRPr>
           </a:p>
         </p:txBody>
       </p:sp>
@@ -3751,7 +3838,7 @@
                   </a:outerShdw>
                 </a:effectLst>
               </a:rPr>
-              <a:t>→ </a:t>
+              <a:t>: “</a:t>
             </a:r>
             <a:r>
               <a:rPr lang="id-ID" sz="4000" dirty="0">
@@ -3769,6 +3856,35 @@
               </a:rPr>
               <a:t>Morph</a:t>
             </a:r>
+            <a:r>
+              <a:rPr lang="en-US" sz="4000" dirty="0">
+                <a:ln w="0"/>
+                <a:solidFill>
+                  <a:schemeClr val="accent1"/>
+                </a:solidFill>
+                <a:effectLst>
+                  <a:outerShdw blurRad="38100" dist="25400" dir="5400000" algn="ctr" rotWithShape="0">
+                    <a:srgbClr val="6E747A">
+                      <a:alpha val="43000"/>
+                    </a:srgbClr>
+                  </a:outerShdw>
+                </a:effectLst>
+              </a:rPr>
+              <a:t>”</a:t>
+            </a:r>
+            <a:endParaRPr lang="id-ID" sz="4000" dirty="0">
+              <a:ln w="0"/>
+              <a:solidFill>
+                <a:schemeClr val="accent1"/>
+              </a:solidFill>
+              <a:effectLst>
+                <a:outerShdw blurRad="38100" dist="25400" dir="5400000" algn="ctr" rotWithShape="0">
+                  <a:srgbClr val="6E747A">
+                    <a:alpha val="43000"/>
+                  </a:srgbClr>
+                </a:outerShdw>
+              </a:effectLst>
+            </a:endParaRPr>
           </a:p>
         </p:txBody>
       </p:sp>
